--- a/tools/myscripts/Frame/RMSE.pptx
+++ b/tools/myscripts/Frame/RMSE.pptx
@@ -115,7 +115,7 @@
 <file path=ppt/revisionInfo.xml><?xml version="1.0" encoding="utf-8"?>
 <p1510:revInfo xmlns:a="http://schemas.openxmlformats.org/drawingml/2006/main" xmlns:r="http://schemas.openxmlformats.org/officeDocument/2006/relationships" xmlns:p1510="http://schemas.microsoft.com/office/powerpoint/2015/10/main">
   <p1510:revLst>
-    <p1510:client id="{B485C8C8-C798-4ACF-B718-2BB058878700}" v="46" dt="2025-03-24T15:15:21.107"/>
+    <p1510:client id="{B485C8C8-C798-4ACF-B718-2BB058878700}" v="50" dt="2025-04-01T00:17:32.148"/>
   </p1510:revLst>
 </p1510:revInfo>
 </file>
@@ -125,12 +125,12 @@
   <pc:docChgLst>
     <pc:chgData name="Stanley Lin" userId="e908253626943539" providerId="LiveId" clId="{B485C8C8-C798-4ACF-B718-2BB058878700}"/>
     <pc:docChg chg="undo custSel addSld modSld">
-      <pc:chgData name="Stanley Lin" userId="e908253626943539" providerId="LiveId" clId="{B485C8C8-C798-4ACF-B718-2BB058878700}" dt="2025-03-24T16:14:22.560" v="1109" actId="20577"/>
+      <pc:chgData name="Stanley Lin" userId="e908253626943539" providerId="LiveId" clId="{B485C8C8-C798-4ACF-B718-2BB058878700}" dt="2025-04-01T00:44:03.624" v="1209" actId="20577"/>
       <pc:docMkLst>
         <pc:docMk/>
       </pc:docMkLst>
       <pc:sldChg chg="addSp delSp modSp new mod">
-        <pc:chgData name="Stanley Lin" userId="e908253626943539" providerId="LiveId" clId="{B485C8C8-C798-4ACF-B718-2BB058878700}" dt="2025-03-24T16:14:22.560" v="1109" actId="20577"/>
+        <pc:chgData name="Stanley Lin" userId="e908253626943539" providerId="LiveId" clId="{B485C8C8-C798-4ACF-B718-2BB058878700}" dt="2025-04-01T00:44:03.624" v="1209" actId="20577"/>
         <pc:sldMkLst>
           <pc:docMk/>
           <pc:sldMk cId="425117932" sldId="256"/>
@@ -152,7 +152,7 @@
           </ac:spMkLst>
         </pc:spChg>
         <pc:spChg chg="add mod">
-          <ac:chgData name="Stanley Lin" userId="e908253626943539" providerId="LiveId" clId="{B485C8C8-C798-4ACF-B718-2BB058878700}" dt="2025-03-24T15:12:26.137" v="998" actId="20577"/>
+          <ac:chgData name="Stanley Lin" userId="e908253626943539" providerId="LiveId" clId="{B485C8C8-C798-4ACF-B718-2BB058878700}" dt="2025-04-01T00:15:19.990" v="1153" actId="20577"/>
           <ac:spMkLst>
             <pc:docMk/>
             <pc:sldMk cId="425117932" sldId="256"/>
@@ -160,7 +160,7 @@
           </ac:spMkLst>
         </pc:spChg>
         <pc:spChg chg="add mod">
-          <ac:chgData name="Stanley Lin" userId="e908253626943539" providerId="LiveId" clId="{B485C8C8-C798-4ACF-B718-2BB058878700}" dt="2025-03-24T15:12:41.408" v="1020" actId="20577"/>
+          <ac:chgData name="Stanley Lin" userId="e908253626943539" providerId="LiveId" clId="{B485C8C8-C798-4ACF-B718-2BB058878700}" dt="2025-04-01T00:15:32.891" v="1185" actId="20577"/>
           <ac:spMkLst>
             <pc:docMk/>
             <pc:sldMk cId="425117932" sldId="256"/>
@@ -208,7 +208,7 @@
           </ac:spMkLst>
         </pc:spChg>
         <pc:spChg chg="add mod">
-          <ac:chgData name="Stanley Lin" userId="e908253626943539" providerId="LiveId" clId="{B485C8C8-C798-4ACF-B718-2BB058878700}" dt="2025-03-24T15:13:37.053" v="1023" actId="20577"/>
+          <ac:chgData name="Stanley Lin" userId="e908253626943539" providerId="LiveId" clId="{B485C8C8-C798-4ACF-B718-2BB058878700}" dt="2025-04-01T00:15:57.790" v="1187" actId="20577"/>
           <ac:spMkLst>
             <pc:docMk/>
             <pc:sldMk cId="425117932" sldId="256"/>
@@ -216,7 +216,7 @@
           </ac:spMkLst>
         </pc:spChg>
         <pc:spChg chg="add mod">
-          <ac:chgData name="Stanley Lin" userId="e908253626943539" providerId="LiveId" clId="{B485C8C8-C798-4ACF-B718-2BB058878700}" dt="2025-03-24T15:14:21.159" v="1031" actId="20577"/>
+          <ac:chgData name="Stanley Lin" userId="e908253626943539" providerId="LiveId" clId="{B485C8C8-C798-4ACF-B718-2BB058878700}" dt="2025-04-01T00:17:12.406" v="1201" actId="20577"/>
           <ac:spMkLst>
             <pc:docMk/>
             <pc:sldMk cId="425117932" sldId="256"/>
@@ -240,7 +240,7 @@
           </ac:spMkLst>
         </pc:spChg>
         <pc:spChg chg="add mod">
-          <ac:chgData name="Stanley Lin" userId="e908253626943539" providerId="LiveId" clId="{B485C8C8-C798-4ACF-B718-2BB058878700}" dt="2025-03-24T15:14:00.019" v="1028" actId="20577"/>
+          <ac:chgData name="Stanley Lin" userId="e908253626943539" providerId="LiveId" clId="{B485C8C8-C798-4ACF-B718-2BB058878700}" dt="2025-04-01T00:16:01.919" v="1191" actId="20577"/>
           <ac:spMkLst>
             <pc:docMk/>
             <pc:sldMk cId="425117932" sldId="256"/>
@@ -248,7 +248,7 @@
           </ac:spMkLst>
         </pc:spChg>
         <pc:spChg chg="add mod">
-          <ac:chgData name="Stanley Lin" userId="e908253626943539" providerId="LiveId" clId="{B485C8C8-C798-4ACF-B718-2BB058878700}" dt="2025-03-24T15:15:35.760" v="1037" actId="20577"/>
+          <ac:chgData name="Stanley Lin" userId="e908253626943539" providerId="LiveId" clId="{B485C8C8-C798-4ACF-B718-2BB058878700}" dt="2025-04-01T00:17:45.174" v="1205" actId="20577"/>
           <ac:spMkLst>
             <pc:docMk/>
             <pc:sldMk cId="425117932" sldId="256"/>
@@ -264,7 +264,7 @@
           </ac:spMkLst>
         </pc:spChg>
         <pc:spChg chg="add mod">
-          <ac:chgData name="Stanley Lin" userId="e908253626943539" providerId="LiveId" clId="{B485C8C8-C798-4ACF-B718-2BB058878700}" dt="2025-03-24T16:09:58.369" v="1101" actId="20577"/>
+          <ac:chgData name="Stanley Lin" userId="e908253626943539" providerId="LiveId" clId="{B485C8C8-C798-4ACF-B718-2BB058878700}" dt="2025-04-01T00:16:10.255" v="1197" actId="20577"/>
           <ac:spMkLst>
             <pc:docMk/>
             <pc:sldMk cId="425117932" sldId="256"/>
@@ -280,7 +280,7 @@
           </ac:spMkLst>
         </pc:spChg>
         <pc:spChg chg="add mod">
-          <ac:chgData name="Stanley Lin" userId="e908253626943539" providerId="LiveId" clId="{B485C8C8-C798-4ACF-B718-2BB058878700}" dt="2025-03-24T16:08:19.913" v="1095" actId="20577"/>
+          <ac:chgData name="Stanley Lin" userId="e908253626943539" providerId="LiveId" clId="{B485C8C8-C798-4ACF-B718-2BB058878700}" dt="2025-04-01T00:44:03.624" v="1209" actId="20577"/>
           <ac:spMkLst>
             <pc:docMk/>
             <pc:sldMk cId="425117932" sldId="256"/>
@@ -312,7 +312,7 @@
           </ac:picMkLst>
         </pc:picChg>
         <pc:picChg chg="add mod">
-          <ac:chgData name="Stanley Lin" userId="e908253626943539" providerId="LiveId" clId="{B485C8C8-C798-4ACF-B718-2BB058878700}" dt="2025-03-24T15:13:17.721" v="1021" actId="14826"/>
+          <ac:chgData name="Stanley Lin" userId="e908253626943539" providerId="LiveId" clId="{B485C8C8-C798-4ACF-B718-2BB058878700}" dt="2025-04-01T00:16:50.514" v="1198" actId="14826"/>
           <ac:picMkLst>
             <pc:docMk/>
             <pc:sldMk cId="425117932" sldId="256"/>
@@ -320,7 +320,7 @@
           </ac:picMkLst>
         </pc:picChg>
         <pc:picChg chg="add mod">
-          <ac:chgData name="Stanley Lin" userId="e908253626943539" providerId="LiveId" clId="{B485C8C8-C798-4ACF-B718-2BB058878700}" dt="2025-03-24T15:14:09.274" v="1029" actId="14826"/>
+          <ac:chgData name="Stanley Lin" userId="e908253626943539" providerId="LiveId" clId="{B485C8C8-C798-4ACF-B718-2BB058878700}" dt="2025-04-01T00:16:59.061" v="1199" actId="14826"/>
           <ac:picMkLst>
             <pc:docMk/>
             <pc:sldMk cId="425117932" sldId="256"/>
@@ -352,7 +352,7 @@
           </ac:picMkLst>
         </pc:picChg>
         <pc:picChg chg="add mod">
-          <ac:chgData name="Stanley Lin" userId="e908253626943539" providerId="LiveId" clId="{B485C8C8-C798-4ACF-B718-2BB058878700}" dt="2025-03-24T15:13:47.604" v="1024" actId="14826"/>
+          <ac:chgData name="Stanley Lin" userId="e908253626943539" providerId="LiveId" clId="{B485C8C8-C798-4ACF-B718-2BB058878700}" dt="2025-04-01T00:17:26.346" v="1202" actId="14826"/>
           <ac:picMkLst>
             <pc:docMk/>
             <pc:sldMk cId="425117932" sldId="256"/>
@@ -360,7 +360,7 @@
           </ac:picMkLst>
         </pc:picChg>
         <pc:picChg chg="add mod">
-          <ac:chgData name="Stanley Lin" userId="e908253626943539" providerId="LiveId" clId="{B485C8C8-C798-4ACF-B718-2BB058878700}" dt="2025-03-24T15:15:21.107" v="1033" actId="14826"/>
+          <ac:chgData name="Stanley Lin" userId="e908253626943539" providerId="LiveId" clId="{B485C8C8-C798-4ACF-B718-2BB058878700}" dt="2025-04-01T00:17:32.148" v="1203" actId="14826"/>
           <ac:picMkLst>
             <pc:docMk/>
             <pc:sldMk cId="425117932" sldId="256"/>
@@ -528,7 +528,7 @@
           <a:p>
             <a:fld id="{3000CB68-30A9-4EE0-BC07-5DBE52BC06A2}" type="datetimeFigureOut">
               <a:rPr lang="zh-TW" altLang="en-US" smtClean="0"/>
-              <a:t>2025/3/24</a:t>
+              <a:t>2025/4/1</a:t>
             </a:fld>
             <a:endParaRPr lang="zh-TW" altLang="en-US"/>
           </a:p>
@@ -726,7 +726,7 @@
           <a:p>
             <a:fld id="{3000CB68-30A9-4EE0-BC07-5DBE52BC06A2}" type="datetimeFigureOut">
               <a:rPr lang="zh-TW" altLang="en-US" smtClean="0"/>
-              <a:t>2025/3/24</a:t>
+              <a:t>2025/4/1</a:t>
             </a:fld>
             <a:endParaRPr lang="zh-TW" altLang="en-US"/>
           </a:p>
@@ -934,7 +934,7 @@
           <a:p>
             <a:fld id="{3000CB68-30A9-4EE0-BC07-5DBE52BC06A2}" type="datetimeFigureOut">
               <a:rPr lang="zh-TW" altLang="en-US" smtClean="0"/>
-              <a:t>2025/3/24</a:t>
+              <a:t>2025/4/1</a:t>
             </a:fld>
             <a:endParaRPr lang="zh-TW" altLang="en-US"/>
           </a:p>
@@ -1132,7 +1132,7 @@
           <a:p>
             <a:fld id="{3000CB68-30A9-4EE0-BC07-5DBE52BC06A2}" type="datetimeFigureOut">
               <a:rPr lang="zh-TW" altLang="en-US" smtClean="0"/>
-              <a:t>2025/3/24</a:t>
+              <a:t>2025/4/1</a:t>
             </a:fld>
             <a:endParaRPr lang="zh-TW" altLang="en-US"/>
           </a:p>
@@ -1407,7 +1407,7 @@
           <a:p>
             <a:fld id="{3000CB68-30A9-4EE0-BC07-5DBE52BC06A2}" type="datetimeFigureOut">
               <a:rPr lang="zh-TW" altLang="en-US" smtClean="0"/>
-              <a:t>2025/3/24</a:t>
+              <a:t>2025/4/1</a:t>
             </a:fld>
             <a:endParaRPr lang="zh-TW" altLang="en-US"/>
           </a:p>
@@ -1672,7 +1672,7 @@
           <a:p>
             <a:fld id="{3000CB68-30A9-4EE0-BC07-5DBE52BC06A2}" type="datetimeFigureOut">
               <a:rPr lang="zh-TW" altLang="en-US" smtClean="0"/>
-              <a:t>2025/3/24</a:t>
+              <a:t>2025/4/1</a:t>
             </a:fld>
             <a:endParaRPr lang="zh-TW" altLang="en-US"/>
           </a:p>
@@ -2084,7 +2084,7 @@
           <a:p>
             <a:fld id="{3000CB68-30A9-4EE0-BC07-5DBE52BC06A2}" type="datetimeFigureOut">
               <a:rPr lang="zh-TW" altLang="en-US" smtClean="0"/>
-              <a:t>2025/3/24</a:t>
+              <a:t>2025/4/1</a:t>
             </a:fld>
             <a:endParaRPr lang="zh-TW" altLang="en-US"/>
           </a:p>
@@ -2225,7 +2225,7 @@
           <a:p>
             <a:fld id="{3000CB68-30A9-4EE0-BC07-5DBE52BC06A2}" type="datetimeFigureOut">
               <a:rPr lang="zh-TW" altLang="en-US" smtClean="0"/>
-              <a:t>2025/3/24</a:t>
+              <a:t>2025/4/1</a:t>
             </a:fld>
             <a:endParaRPr lang="zh-TW" altLang="en-US"/>
           </a:p>
@@ -2338,7 +2338,7 @@
           <a:p>
             <a:fld id="{3000CB68-30A9-4EE0-BC07-5DBE52BC06A2}" type="datetimeFigureOut">
               <a:rPr lang="zh-TW" altLang="en-US" smtClean="0"/>
-              <a:t>2025/3/24</a:t>
+              <a:t>2025/4/1</a:t>
             </a:fld>
             <a:endParaRPr lang="zh-TW" altLang="en-US"/>
           </a:p>
@@ -2649,7 +2649,7 @@
           <a:p>
             <a:fld id="{3000CB68-30A9-4EE0-BC07-5DBE52BC06A2}" type="datetimeFigureOut">
               <a:rPr lang="zh-TW" altLang="en-US" smtClean="0"/>
-              <a:t>2025/3/24</a:t>
+              <a:t>2025/4/1</a:t>
             </a:fld>
             <a:endParaRPr lang="zh-TW" altLang="en-US"/>
           </a:p>
@@ -2937,7 +2937,7 @@
           <a:p>
             <a:fld id="{3000CB68-30A9-4EE0-BC07-5DBE52BC06A2}" type="datetimeFigureOut">
               <a:rPr lang="zh-TW" altLang="en-US" smtClean="0"/>
-              <a:t>2025/3/24</a:t>
+              <a:t>2025/4/1</a:t>
             </a:fld>
             <a:endParaRPr lang="zh-TW" altLang="en-US"/>
           </a:p>
@@ -3178,7 +3178,7 @@
           <a:p>
             <a:fld id="{3000CB68-30A9-4EE0-BC07-5DBE52BC06A2}" type="datetimeFigureOut">
               <a:rPr lang="zh-TW" altLang="en-US" smtClean="0"/>
-              <a:t>2025/3/24</a:t>
+              <a:t>2025/4/1</a:t>
             </a:fld>
             <a:endParaRPr lang="zh-TW" altLang="en-US"/>
           </a:p>
@@ -3868,8 +3868,8 @@
         </p:nvSpPr>
         <p:spPr>
           <a:xfrm>
-            <a:off x="6876287" y="584296"/>
-            <a:ext cx="1564852" cy="553998"/>
+            <a:off x="6814347" y="584296"/>
+            <a:ext cx="1688732" cy="553998"/>
           </a:xfrm>
           <a:prstGeom prst="rect">
             <a:avLst/>
@@ -3896,7 +3896,7 @@
               <a:rPr lang="en-US" altLang="zh-TW" sz="1400" dirty="0">
                 <a:cs typeface="Times New Roman" panose="02020603050405020304" pitchFamily="18" charset="0"/>
               </a:rPr>
-              <a:t>(1 spatial sample)</a:t>
+              <a:t>(w/o accumulation)</a:t>
             </a:r>
             <a:endParaRPr lang="zh-TW" altLang="en-US" sz="1400" dirty="0">
               <a:cs typeface="Times New Roman" panose="02020603050405020304" pitchFamily="18" charset="0"/>
@@ -3958,8 +3958,8 @@
         </p:nvSpPr>
         <p:spPr>
           <a:xfrm>
-            <a:off x="8483387" y="584296"/>
-            <a:ext cx="1651414" cy="553998"/>
+            <a:off x="8509036" y="584296"/>
+            <a:ext cx="1600118" cy="553998"/>
           </a:xfrm>
           <a:prstGeom prst="rect">
             <a:avLst/>
@@ -3986,7 +3986,7 @@
               <a:rPr lang="en-US" altLang="zh-TW" sz="1400" dirty="0">
                 <a:cs typeface="Times New Roman" panose="02020603050405020304" pitchFamily="18" charset="0"/>
               </a:rPr>
-              <a:t>(4 spatial samples)</a:t>
+              <a:t>(w/ accumulation)</a:t>
             </a:r>
             <a:endParaRPr lang="zh-TW" altLang="en-US" sz="1400" dirty="0">
               <a:cs typeface="Times New Roman" panose="02020603050405020304" pitchFamily="18" charset="0"/>
@@ -4476,7 +4476,7 @@
                   <a:schemeClr val="bg1"/>
                 </a:solidFill>
               </a:rPr>
-              <a:t>RMSE: 0.154</a:t>
+              <a:t>RMSE: 0.104</a:t>
             </a:r>
             <a:endParaRPr lang="zh-TW" altLang="en-US" sz="1600" dirty="0">
               <a:solidFill>
@@ -4520,7 +4520,7 @@
                   <a:schemeClr val="bg1"/>
                 </a:solidFill>
               </a:rPr>
-              <a:t>RMSE: 0.104</a:t>
+              <a:t>RMSE: 0.109</a:t>
             </a:r>
             <a:endParaRPr lang="zh-TW" altLang="en-US" sz="1600" dirty="0">
               <a:solidFill>
@@ -4652,7 +4652,7 @@
                   <a:schemeClr val="bg1"/>
                 </a:solidFill>
               </a:rPr>
-              <a:t>RMSE: 0.140</a:t>
+              <a:t>RMSE: 0.112</a:t>
             </a:r>
             <a:endParaRPr lang="zh-TW" altLang="en-US" sz="1600" dirty="0">
               <a:solidFill>
@@ -4696,7 +4696,7 @@
                   <a:schemeClr val="bg1"/>
                 </a:solidFill>
               </a:rPr>
-              <a:t>RMSE: 0.112</a:t>
+              <a:t>RMSE: 0.111</a:t>
             </a:r>
             <a:endParaRPr lang="zh-TW" altLang="en-US" sz="1600" dirty="0">
               <a:solidFill>
@@ -4772,7 +4772,7 @@
           <a:p>
             <a:r>
               <a:rPr lang="en-US" altLang="zh-TW" sz="1600" dirty="0"/>
-              <a:t>42.72ms</a:t>
+              <a:t>43.83ms</a:t>
             </a:r>
             <a:endParaRPr lang="zh-TW" altLang="en-US" sz="1600" dirty="0"/>
           </a:p>
@@ -4844,7 +4844,7 @@
           <a:p>
             <a:r>
               <a:rPr lang="en-US" altLang="zh-TW" sz="1600" dirty="0"/>
-              <a:t>43.83ms</a:t>
+              <a:t>44.43ms</a:t>
             </a:r>
             <a:endParaRPr lang="zh-TW" altLang="en-US" sz="1600" dirty="0"/>
           </a:p>
